--- a/docs/presentations/v3/03-telemetry.pptx
+++ b/docs/presentations/v3/03-telemetry.pptx
@@ -3463,7 +3463,7 @@
               <a:buNone/>
             </a:pPr>
             <a:r>
-              <a:rPr lang="en-US" sz="1900" dirty="0">
+              <a:rPr lang="en-US" sz="1400" dirty="0">
                 <a:solidFill>
                   <a:srgbClr val="9EF01A"/>
                 </a:solidFill>
@@ -3473,7 +3473,7 @@
               </a:rPr>
               <a:t>double rotations = m_driveMotor.getPosition().getValue().in(Rotations);</a:t>
             </a:r>
-            <a:endParaRPr lang="en-US" sz="1900" dirty="0"/>
+            <a:endParaRPr lang="en-US" sz="1400" dirty="0"/>
           </a:p>
           <a:p>
             <a:pPr indent="0" marL="0">
@@ -3483,7 +3483,7 @@
               <a:buNone/>
             </a:pPr>
             <a:r>
-              <a:rPr lang="en-US" sz="1900" dirty="0">
+              <a:rPr lang="en-US" sz="1400" dirty="0">
                 <a:solidFill>
                   <a:srgbClr val="9EF01A"/>
                 </a:solidFill>
@@ -3493,7 +3493,7 @@
               </a:rPr>
               <a:t>double rps       = m_driveMotor.getVelocity().getValue().in(RotationsPerSecond);</a:t>
             </a:r>
-            <a:endParaRPr lang="en-US" sz="1900" dirty="0"/>
+            <a:endParaRPr lang="en-US" sz="1400" dirty="0"/>
           </a:p>
         </p:txBody>
       </p:sp>
@@ -3506,11 +3506,11 @@
         <p:spPr>
           <a:xfrm>
             <a:off x="640080" y="3566160"/>
-            <a:ext cx="10881360" cy="2286000"/>
+            <a:ext cx="10881360" cy="2423160"/>
           </a:xfrm>
           <a:prstGeom prst="roundRect">
             <a:avLst>
-              <a:gd name="adj" fmla="val 4000"/>
+              <a:gd name="adj" fmla="val 3774"/>
             </a:avLst>
           </a:prstGeom>
           <a:solidFill>
@@ -3570,7 +3570,7 @@
         <p:spPr>
           <a:xfrm>
             <a:off x="914400" y="4418330"/>
-            <a:ext cx="10332720" cy="1159510"/>
+            <a:ext cx="10332720" cy="1296670"/>
           </a:xfrm>
           <a:prstGeom prst="rect">
             <a:avLst/>
@@ -3976,7 +3976,7 @@
               <a:buNone/>
             </a:pPr>
             <a:r>
-              <a:rPr lang="en-US" sz="2000" dirty="0">
+              <a:rPr lang="en-US" sz="1600" dirty="0">
                 <a:solidFill>
                   <a:srgbClr val="9EF01A"/>
                 </a:solidFill>
@@ -3986,7 +3986,7 @@
               </a:rPr>
               <a:t>SmartDashboard.putNumber("DriveModule/PositionRotations", rotations);</a:t>
             </a:r>
-            <a:endParaRPr lang="en-US" sz="2000" dirty="0"/>
+            <a:endParaRPr lang="en-US" sz="1600" dirty="0"/>
           </a:p>
         </p:txBody>
       </p:sp>
@@ -4361,11 +4361,11 @@
         <p:spPr>
           <a:xfrm>
             <a:off x="640080" y="1600200"/>
-            <a:ext cx="10881360" cy="1463040"/>
+            <a:ext cx="10881360" cy="1371600"/>
           </a:xfrm>
           <a:prstGeom prst="roundRect">
             <a:avLst>
-              <a:gd name="adj" fmla="val 7500"/>
+              <a:gd name="adj" fmla="val 8000"/>
             </a:avLst>
           </a:prstGeom>
           <a:solidFill>
@@ -4450,7 +4450,7 @@
         <p:spPr>
           <a:xfrm>
             <a:off x="914400" y="1801368"/>
-            <a:ext cx="10195560" cy="1097280"/>
+            <a:ext cx="10195560" cy="1005840"/>
           </a:xfrm>
           <a:prstGeom prst="rect">
             <a:avLst/>
@@ -4469,7 +4469,7 @@
               <a:buNone/>
             </a:pPr>
             <a:r>
-              <a:rPr lang="en-US" sz="2000" dirty="0">
+              <a:rPr lang="en-US" sz="1500" dirty="0">
                 <a:solidFill>
                   <a:srgbClr val="FFD166"/>
                 </a:solidFill>
@@ -4479,7 +4479,7 @@
               </a:rPr>
               <a:t>public Robot() {</a:t>
             </a:r>
-            <a:endParaRPr lang="en-US" sz="2000" dirty="0"/>
+            <a:endParaRPr lang="en-US" sz="1500" dirty="0"/>
           </a:p>
           <a:p>
             <a:pPr indent="0" marL="0">
@@ -4489,7 +4489,7 @@
               <a:buNone/>
             </a:pPr>
             <a:r>
-              <a:rPr lang="en-US" sz="2000" dirty="0">
+              <a:rPr lang="en-US" sz="1500" dirty="0">
                 <a:solidFill>
                   <a:srgbClr val="9EF01A"/>
                 </a:solidFill>
@@ -4499,7 +4499,7 @@
               </a:rPr>
               <a:t>  DataLogManager.start(); // saves every published value to a .wpilog file</a:t>
             </a:r>
-            <a:endParaRPr lang="en-US" sz="2000" dirty="0"/>
+            <a:endParaRPr lang="en-US" sz="1500" dirty="0"/>
           </a:p>
           <a:p>
             <a:pPr indent="0" marL="0">
@@ -4509,7 +4509,7 @@
               <a:buNone/>
             </a:pPr>
             <a:r>
-              <a:rPr lang="en-US" sz="2000" dirty="0">
+              <a:rPr lang="en-US" sz="1500" dirty="0">
                 <a:solidFill>
                   <a:srgbClr val="D7E3F4"/>
                 </a:solidFill>
@@ -4519,7 +4519,7 @@
               </a:rPr>
               <a:t>}</a:t>
             </a:r>
-            <a:endParaRPr lang="en-US" sz="2000" dirty="0"/>
+            <a:endParaRPr lang="en-US" sz="1500" dirty="0"/>
           </a:p>
         </p:txBody>
       </p:sp>
@@ -4894,11 +4894,11 @@
         <p:spPr>
           <a:xfrm>
             <a:off x="640080" y="1600200"/>
-            <a:ext cx="10881360" cy="3246120"/>
+            <a:ext cx="10881360" cy="3383280"/>
           </a:xfrm>
           <a:prstGeom prst="roundRect">
             <a:avLst>
-              <a:gd name="adj" fmla="val 3380"/>
+              <a:gd name="adj" fmla="val 3243"/>
             </a:avLst>
           </a:prstGeom>
           <a:solidFill>
@@ -4983,7 +4983,7 @@
         <p:spPr>
           <a:xfrm>
             <a:off x="914400" y="1801368"/>
-            <a:ext cx="10195560" cy="2880360"/>
+            <a:ext cx="10195560" cy="3017520"/>
           </a:xfrm>
           <a:prstGeom prst="rect">
             <a:avLst/>
@@ -5002,7 +5002,7 @@
               <a:buNone/>
             </a:pPr>
             <a:r>
-              <a:rPr lang="en-US" sz="1800" dirty="0">
+              <a:rPr lang="en-US" sz="1400" dirty="0">
                 <a:solidFill>
                   <a:srgbClr val="FFD166"/>
                 </a:solidFill>
@@ -5012,7 +5012,7 @@
               </a:rPr>
               <a:t>public DriveModule() {</a:t>
             </a:r>
-            <a:endParaRPr lang="en-US" sz="1800" dirty="0"/>
+            <a:endParaRPr lang="en-US" sz="1400" dirty="0"/>
           </a:p>
           <a:p>
             <a:pPr indent="0" marL="0">
@@ -5022,7 +5022,7 @@
               <a:buNone/>
             </a:pPr>
             <a:r>
-              <a:rPr lang="en-US" sz="1800" dirty="0">
+              <a:rPr lang="en-US" sz="1400" dirty="0">
                 <a:solidFill>
                   <a:srgbClr val="9EF01A"/>
                 </a:solidFill>
@@ -5032,7 +5032,7 @@
               </a:rPr>
               <a:t>  Scheduler.getDefault().addPeriodic(this::logTelemetry);</a:t>
             </a:r>
-            <a:endParaRPr lang="en-US" sz="1800" dirty="0"/>
+            <a:endParaRPr lang="en-US" sz="1400" dirty="0"/>
           </a:p>
           <a:p>
             <a:pPr indent="0" marL="0">
@@ -5042,7 +5042,7 @@
               <a:buNone/>
             </a:pPr>
             <a:r>
-              <a:rPr lang="en-US" sz="1800" dirty="0">
+              <a:rPr lang="en-US" sz="1400" dirty="0">
                 <a:solidFill>
                   <a:srgbClr val="D7E3F4"/>
                 </a:solidFill>
@@ -5052,7 +5052,7 @@
               </a:rPr>
               <a:t>}</a:t>
             </a:r>
-            <a:endParaRPr lang="en-US" sz="1800" dirty="0"/>
+            <a:endParaRPr lang="en-US" sz="1400" dirty="0"/>
           </a:p>
           <a:p>
             <a:pPr indent="0" marL="0">
@@ -5061,7 +5061,7 @@
               </a:lnSpc>
               <a:buNone/>
             </a:pPr>
-            <a:endParaRPr lang="en-US" sz="1800" dirty="0"/>
+            <a:endParaRPr lang="en-US" sz="1400" dirty="0"/>
           </a:p>
           <a:p>
             <a:pPr indent="0" marL="0">
@@ -5071,7 +5071,7 @@
               <a:buNone/>
             </a:pPr>
             <a:r>
-              <a:rPr lang="en-US" sz="1800" dirty="0">
+              <a:rPr lang="en-US" sz="1400" dirty="0">
                 <a:solidFill>
                   <a:srgbClr val="FFD166"/>
                 </a:solidFill>
@@ -5081,7 +5081,7 @@
               </a:rPr>
               <a:t>private void logTelemetry() {</a:t>
             </a:r>
-            <a:endParaRPr lang="en-US" sz="1800" dirty="0"/>
+            <a:endParaRPr lang="en-US" sz="1400" dirty="0"/>
           </a:p>
           <a:p>
             <a:pPr indent="0" marL="0">
@@ -5091,7 +5091,7 @@
               <a:buNone/>
             </a:pPr>
             <a:r>
-              <a:rPr lang="en-US" sz="1800" dirty="0">
+              <a:rPr lang="en-US" sz="1400" dirty="0">
                 <a:solidFill>
                   <a:srgbClr val="D7E3F4"/>
                 </a:solidFill>
@@ -5101,7 +5101,7 @@
               </a:rPr>
               <a:t>  double rotations = m_driveMotor.getPosition().getValue().in(Rotations);</a:t>
             </a:r>
-            <a:endParaRPr lang="en-US" sz="1800" dirty="0"/>
+            <a:endParaRPr lang="en-US" sz="1400" dirty="0"/>
           </a:p>
           <a:p>
             <a:pPr indent="0" marL="0">
@@ -5111,7 +5111,7 @@
               <a:buNone/>
             </a:pPr>
             <a:r>
-              <a:rPr lang="en-US" sz="1800" dirty="0">
+              <a:rPr lang="en-US" sz="1400" dirty="0">
                 <a:solidFill>
                   <a:srgbClr val="D7E3F4"/>
                 </a:solidFill>
@@ -5121,7 +5121,7 @@
               </a:rPr>
               <a:t>  double rps = m_driveMotor.getVelocity().getValue().in(RotationsPerSecond);</a:t>
             </a:r>
-            <a:endParaRPr lang="en-US" sz="1800" dirty="0"/>
+            <a:endParaRPr lang="en-US" sz="1400" dirty="0"/>
           </a:p>
           <a:p>
             <a:pPr indent="0" marL="0">
@@ -5130,7 +5130,7 @@
               </a:lnSpc>
               <a:buNone/>
             </a:pPr>
-            <a:endParaRPr lang="en-US" sz="1800" dirty="0"/>
+            <a:endParaRPr lang="en-US" sz="1400" dirty="0"/>
           </a:p>
           <a:p>
             <a:pPr indent="0" marL="0">
@@ -5140,7 +5140,7 @@
               <a:buNone/>
             </a:pPr>
             <a:r>
-              <a:rPr lang="en-US" sz="1800" dirty="0">
+              <a:rPr lang="en-US" sz="1400" dirty="0">
                 <a:solidFill>
                   <a:srgbClr val="9EF01A"/>
                 </a:solidFill>
@@ -5150,7 +5150,7 @@
               </a:rPr>
               <a:t>  SmartDashboard.putNumber("DriveModule/PositionRotations", rotations);</a:t>
             </a:r>
-            <a:endParaRPr lang="en-US" sz="1800" dirty="0"/>
+            <a:endParaRPr lang="en-US" sz="1400" dirty="0"/>
           </a:p>
           <a:p>
             <a:pPr indent="0" marL="0">
@@ -5160,7 +5160,7 @@
               <a:buNone/>
             </a:pPr>
             <a:r>
-              <a:rPr lang="en-US" sz="1800" dirty="0">
+              <a:rPr lang="en-US" sz="1400" dirty="0">
                 <a:solidFill>
                   <a:srgbClr val="9EF01A"/>
                 </a:solidFill>
@@ -5170,7 +5170,7 @@
               </a:rPr>
               <a:t>  SmartDashboard.putNumber("DriveModule/VelocityRotPerSec", rps);</a:t>
             </a:r>
-            <a:endParaRPr lang="en-US" sz="1800" dirty="0"/>
+            <a:endParaRPr lang="en-US" sz="1400" dirty="0"/>
           </a:p>
           <a:p>
             <a:pPr indent="0" marL="0">
@@ -5180,7 +5180,7 @@
               <a:buNone/>
             </a:pPr>
             <a:r>
-              <a:rPr lang="en-US" sz="1800" dirty="0">
+              <a:rPr lang="en-US" sz="1400" dirty="0">
                 <a:solidFill>
                   <a:srgbClr val="D7E3F4"/>
                 </a:solidFill>
@@ -5190,7 +5190,7 @@
               </a:rPr>
               <a:t>}</a:t>
             </a:r>
-            <a:endParaRPr lang="en-US" sz="1800" dirty="0"/>
+            <a:endParaRPr lang="en-US" sz="1400" dirty="0"/>
           </a:p>
         </p:txBody>
       </p:sp>
@@ -5202,12 +5202,12 @@
         </p:nvSpPr>
         <p:spPr>
           <a:xfrm>
-            <a:off x="640080" y="5029200"/>
-            <a:ext cx="10881360" cy="1234440"/>
+            <a:off x="640080" y="5166360"/>
+            <a:ext cx="10881360" cy="1143000"/>
           </a:xfrm>
           <a:prstGeom prst="roundRect">
             <a:avLst>
-              <a:gd name="adj" fmla="val 7407"/>
+              <a:gd name="adj" fmla="val 8000"/>
             </a:avLst>
           </a:prstGeom>
           <a:solidFill>
@@ -5224,8 +5224,8 @@
         </p:nvSpPr>
         <p:spPr>
           <a:xfrm>
-            <a:off x="822960" y="5212080"/>
-            <a:ext cx="10515600" cy="868680"/>
+            <a:off x="822960" y="5349240"/>
+            <a:ext cx="10515600" cy="777240"/>
           </a:xfrm>
           <a:prstGeom prst="rect">
             <a:avLst/>
@@ -6587,7 +6587,7 @@
               <a:buNone/>
             </a:pPr>
             <a:r>
-              <a:rPr lang="en-US" sz="1600" dirty="0">
+              <a:rPr lang="en-US" sz="1200" dirty="0">
                 <a:solidFill>
                   <a:srgbClr val="9EF01A"/>
                 </a:solidFill>
@@ -6597,7 +6597,7 @@
               </a:rPr>
               <a:t>Scheduler.getDefault().addEventListener(this::logCommandStart);</a:t>
             </a:r>
-            <a:endParaRPr lang="en-US" sz="1600" dirty="0"/>
+            <a:endParaRPr lang="en-US" sz="1200" dirty="0"/>
           </a:p>
           <a:p>
             <a:pPr indent="0" marL="0">
@@ -6606,7 +6606,7 @@
               </a:lnSpc>
               <a:buNone/>
             </a:pPr>
-            <a:endParaRPr lang="en-US" sz="1600" dirty="0"/>
+            <a:endParaRPr lang="en-US" sz="1200" dirty="0"/>
           </a:p>
           <a:p>
             <a:pPr indent="0" marL="0">
@@ -6616,7 +6616,7 @@
               <a:buNone/>
             </a:pPr>
             <a:r>
-              <a:rPr lang="en-US" sz="1600" dirty="0">
+              <a:rPr lang="en-US" sz="1200" dirty="0">
                 <a:solidFill>
                   <a:srgbClr val="FFD166"/>
                 </a:solidFill>
@@ -6626,7 +6626,7 @@
               </a:rPr>
               <a:t>private void logCommandStart(SchedulerEvent event) {</a:t>
             </a:r>
-            <a:endParaRPr lang="en-US" sz="1600" dirty="0"/>
+            <a:endParaRPr lang="en-US" sz="1200" dirty="0"/>
           </a:p>
           <a:p>
             <a:pPr indent="0" marL="0">
@@ -6636,7 +6636,7 @@
               <a:buNone/>
             </a:pPr>
             <a:r>
-              <a:rPr lang="en-US" sz="1600" dirty="0">
+              <a:rPr lang="en-US" sz="1200" dirty="0">
                 <a:solidFill>
                   <a:srgbClr val="D7E3F4"/>
                 </a:solidFill>
@@ -6646,7 +6646,7 @@
               </a:rPr>
               <a:t>  if (event instanceof SchedulerEvent.Scheduled scheduled</a:t>
             </a:r>
-            <a:endParaRPr lang="en-US" sz="1600" dirty="0"/>
+            <a:endParaRPr lang="en-US" sz="1200" dirty="0"/>
           </a:p>
           <a:p>
             <a:pPr indent="0" marL="0">
@@ -6656,7 +6656,7 @@
               <a:buNone/>
             </a:pPr>
             <a:r>
-              <a:rPr lang="en-US" sz="1600" dirty="0">
+              <a:rPr lang="en-US" sz="1200" dirty="0">
                 <a:solidFill>
                   <a:srgbClr val="D7E3F4"/>
                 </a:solidFill>
@@ -6666,7 +6666,7 @@
               </a:rPr>
               <a:t>      &amp;&amp; scheduled.command().requires(module)) {</a:t>
             </a:r>
-            <a:endParaRPr lang="en-US" sz="1600" dirty="0"/>
+            <a:endParaRPr lang="en-US" sz="1200" dirty="0"/>
           </a:p>
           <a:p>
             <a:pPr indent="0" marL="0">
@@ -6676,7 +6676,7 @@
               <a:buNone/>
             </a:pPr>
             <a:r>
-              <a:rPr lang="en-US" sz="1600" dirty="0">
+              <a:rPr lang="en-US" sz="1200" dirty="0">
                 <a:solidFill>
                   <a:srgbClr val="9EF01A"/>
                 </a:solidFill>
@@ -6686,7 +6686,7 @@
               </a:rPr>
               <a:t>    SmartDashboard.putString("DriveModule/CurrentCommand", scheduled.command().name());</a:t>
             </a:r>
-            <a:endParaRPr lang="en-US" sz="1600" dirty="0"/>
+            <a:endParaRPr lang="en-US" sz="1200" dirty="0"/>
           </a:p>
           <a:p>
             <a:pPr indent="0" marL="0">
@@ -6696,7 +6696,7 @@
               <a:buNone/>
             </a:pPr>
             <a:r>
-              <a:rPr lang="en-US" sz="1600" dirty="0">
+              <a:rPr lang="en-US" sz="1200" dirty="0">
                 <a:solidFill>
                   <a:srgbClr val="D7E3F4"/>
                 </a:solidFill>
@@ -6706,7 +6706,7 @@
               </a:rPr>
               <a:t>  }</a:t>
             </a:r>
-            <a:endParaRPr lang="en-US" sz="1600" dirty="0"/>
+            <a:endParaRPr lang="en-US" sz="1200" dirty="0"/>
           </a:p>
           <a:p>
             <a:pPr indent="0" marL="0">
@@ -6716,7 +6716,7 @@
               <a:buNone/>
             </a:pPr>
             <a:r>
-              <a:rPr lang="en-US" sz="1600" dirty="0">
+              <a:rPr lang="en-US" sz="1200" dirty="0">
                 <a:solidFill>
                   <a:srgbClr val="D7E3F4"/>
                 </a:solidFill>
@@ -6726,7 +6726,7 @@
               </a:rPr>
               <a:t>}</a:t>
             </a:r>
-            <a:endParaRPr lang="en-US" sz="1600" dirty="0"/>
+            <a:endParaRPr lang="en-US" sz="1200" dirty="0"/>
           </a:p>
         </p:txBody>
       </p:sp>
@@ -6738,12 +6738,12 @@
         </p:nvSpPr>
         <p:spPr>
           <a:xfrm>
-            <a:off x="640080" y="4114800"/>
-            <a:ext cx="10881360" cy="2011680"/>
+            <a:off x="640080" y="4023360"/>
+            <a:ext cx="10881360" cy="2377440"/>
           </a:xfrm>
           <a:prstGeom prst="roundRect">
             <a:avLst>
-              <a:gd name="adj" fmla="val 4545"/>
+              <a:gd name="adj" fmla="val 3846"/>
             </a:avLst>
           </a:prstGeom>
           <a:solidFill>
@@ -6760,8 +6760,8 @@
         </p:nvSpPr>
         <p:spPr>
           <a:xfrm>
-            <a:off x="914400" y="4389120"/>
-            <a:ext cx="10332720" cy="863600"/>
+            <a:off x="914400" y="4297680"/>
+            <a:ext cx="10332720" cy="546100"/>
           </a:xfrm>
           <a:prstGeom prst="rect">
             <a:avLst/>
@@ -6788,7 +6788,7 @@
                 <a:ea typeface="Cambria" pitchFamily="34" charset="-122"/>
                 <a:cs typeface="Cambria" pitchFamily="34" charset="-120"/>
               </a:rPr>
-              <a:t>instanceof pattern matching: is this a Scheduled event, and if so, hand it to me typed as one.</a:t>
+              <a:t>Is this a Scheduled event? Type it as one.</a:t>
             </a:r>
             <a:endParaRPr lang="en-US" sz="2000" dirty="0"/>
           </a:p>
@@ -6802,8 +6802,8 @@
         </p:nvSpPr>
         <p:spPr>
           <a:xfrm>
-            <a:off x="914400" y="5252720"/>
-            <a:ext cx="10332720" cy="599440"/>
+            <a:off x="914400" y="4843780"/>
+            <a:ext cx="10332720" cy="1282700"/>
           </a:xfrm>
           <a:prstGeom prst="rect">
             <a:avLst/>

--- a/docs/presentations/v3/03-telemetry.pptx
+++ b/docs/presentations/v3/03-telemetry.pptx
@@ -3355,11 +3355,11 @@
         <p:spPr>
           <a:xfrm>
             <a:off x="640080" y="1600200"/>
-            <a:ext cx="10881360" cy="1737360"/>
+            <a:ext cx="10881360" cy="2011680"/>
           </a:xfrm>
           <a:prstGeom prst="roundRect">
             <a:avLst>
-              <a:gd name="adj" fmla="val 6316"/>
+              <a:gd name="adj" fmla="val 5455"/>
             </a:avLst>
           </a:prstGeom>
           <a:solidFill>
@@ -3443,8 +3443,47 @@
         </p:nvSpPr>
         <p:spPr>
           <a:xfrm>
-            <a:off x="914400" y="1801368"/>
-            <a:ext cx="10195560" cy="1371600"/>
+            <a:off x="914400" y="1728216"/>
+            <a:ext cx="10195560" cy="292608"/>
+          </a:xfrm>
+          <a:prstGeom prst="rect">
+            <a:avLst/>
+          </a:prstGeom>
+          <a:noFill/>
+          <a:ln/>
+        </p:spPr>
+        <p:txBody>
+          <a:bodyPr wrap="square" lIns="0" tIns="0" rIns="0" bIns="0" rtlCol="0" anchor="ctr"/>
+          <a:lstStyle/>
+          <a:p>
+            <a:pPr indent="0" marL="0">
+              <a:buNone/>
+            </a:pPr>
+            <a:r>
+              <a:rPr lang="en-US" sz="1500" i="1" dirty="0">
+                <a:solidFill>
+                  <a:srgbClr val="7FA8C9"/>
+                </a:solidFill>
+                <a:latin typeface="Calibri" pitchFamily="34" charset="0"/>
+                <a:ea typeface="Calibri" pitchFamily="34" charset="-122"/>
+                <a:cs typeface="Calibri" pitchFamily="34" charset="-120"/>
+              </a:rPr>
+              <a:t>Nothing to add yet — this is how you'll read them, in section 4</a:t>
+            </a:r>
+            <a:endParaRPr lang="en-US" sz="1500" dirty="0"/>
+          </a:p>
+        </p:txBody>
+      </p:sp>
+      <p:sp>
+        <p:nvSpPr>
+          <p:cNvPr id="11" name="Text 8"/>
+          <p:cNvSpPr/>
+          <p:nvPr/>
+        </p:nvSpPr>
+        <p:spPr>
+          <a:xfrm>
+            <a:off x="914400" y="2057400"/>
+            <a:ext cx="10195560" cy="1353312"/>
           </a:xfrm>
           <a:prstGeom prst="rect">
             <a:avLst/>
@@ -3499,18 +3538,18 @@
       </p:sp>
       <p:sp>
         <p:nvSpPr>
-          <p:cNvPr id="11" name="Shape 8"/>
-          <p:cNvSpPr/>
-          <p:nvPr/>
-        </p:nvSpPr>
-        <p:spPr>
-          <a:xfrm>
-            <a:off x="640080" y="3566160"/>
-            <a:ext cx="10881360" cy="2423160"/>
+          <p:cNvPr id="12" name="Shape 9"/>
+          <p:cNvSpPr/>
+          <p:nvPr/>
+        </p:nvSpPr>
+        <p:spPr>
+          <a:xfrm>
+            <a:off x="640080" y="3749040"/>
+            <a:ext cx="10881360" cy="2240280"/>
           </a:xfrm>
           <a:prstGeom prst="roundRect">
             <a:avLst>
-              <a:gd name="adj" fmla="val 3774"/>
+              <a:gd name="adj" fmla="val 4082"/>
             </a:avLst>
           </a:prstGeom>
           <a:solidFill>
@@ -3521,13 +3560,13 @@
       </p:sp>
       <p:sp>
         <p:nvSpPr>
-          <p:cNvPr id="12" name="Text 9"/>
-          <p:cNvSpPr/>
-          <p:nvPr/>
-        </p:nvSpPr>
-        <p:spPr>
-          <a:xfrm>
-            <a:off x="914400" y="3840480"/>
+          <p:cNvPr id="13" name="Text 10"/>
+          <p:cNvSpPr/>
+          <p:nvPr/>
+        </p:nvSpPr>
+        <p:spPr>
+          <a:xfrm>
+            <a:off x="914400" y="4023360"/>
             <a:ext cx="10332720" cy="577850"/>
           </a:xfrm>
           <a:prstGeom prst="rect">
@@ -3563,14 +3602,14 @@
       </p:sp>
       <p:sp>
         <p:nvSpPr>
-          <p:cNvPr id="13" name="Text 10"/>
-          <p:cNvSpPr/>
-          <p:nvPr/>
-        </p:nvSpPr>
-        <p:spPr>
-          <a:xfrm>
-            <a:off x="914400" y="4418330"/>
-            <a:ext cx="10332720" cy="1296670"/>
+          <p:cNvPr id="14" name="Text 11"/>
+          <p:cNvSpPr/>
+          <p:nvPr/>
+        </p:nvSpPr>
+        <p:spPr>
+          <a:xfrm>
+            <a:off x="914400" y="4601210"/>
+            <a:ext cx="10332720" cy="1113790"/>
           </a:xfrm>
           <a:prstGeom prst="rect">
             <a:avLst/>
@@ -3605,7 +3644,7 @@
       </p:sp>
       <p:sp>
         <p:nvSpPr>
-          <p:cNvPr id="14" name="Text 11"/>
+          <p:cNvPr id="15" name="Text 12"/>
           <p:cNvSpPr/>
           <p:nvPr/>
         </p:nvSpPr>
@@ -3644,7 +3683,7 @@
       </p:sp>
       <p:sp>
         <p:nvSpPr>
-          <p:cNvPr id="15" name="Text 12"/>
+          <p:cNvPr id="16" name="Text 13"/>
           <p:cNvSpPr/>
           <p:nvPr/>
         </p:nvSpPr>
@@ -3683,7 +3722,7 @@
       </p:sp>
       <p:pic>
         <p:nvPicPr>
-          <p:cNvPr id="16" name="Image 1" descr="/home/user/BasicRobotLessons/docs/presentations/v3/template/assets/logo/team5010-logo-onwhite.png">    </p:cNvPr>
+          <p:cNvPr id="17" name="Image 1" descr="/home/user/BasicRobotLessons/docs/presentations/v3/template/assets/logo/team5010-logo-onwhite.png">    </p:cNvPr>
           <p:cNvPicPr>
             <a:picLocks noChangeAspect="1"/>
           </p:cNvPicPr>
@@ -3868,11 +3907,11 @@
         <p:spPr>
           <a:xfrm>
             <a:off x="640080" y="1600200"/>
-            <a:ext cx="10881360" cy="1234440"/>
+            <a:ext cx="10881360" cy="1463040"/>
           </a:xfrm>
           <a:prstGeom prst="roundRect">
             <a:avLst>
-              <a:gd name="adj" fmla="val 8889"/>
+              <a:gd name="adj" fmla="val 7500"/>
             </a:avLst>
           </a:prstGeom>
           <a:solidFill>
@@ -3956,8 +3995,47 @@
         </p:nvSpPr>
         <p:spPr>
           <a:xfrm>
-            <a:off x="914400" y="1801368"/>
-            <a:ext cx="10195560" cy="868680"/>
+            <a:off x="914400" y="1728216"/>
+            <a:ext cx="10195560" cy="292608"/>
+          </a:xfrm>
+          <a:prstGeom prst="rect">
+            <a:avLst/>
+          </a:prstGeom>
+          <a:noFill/>
+          <a:ln/>
+        </p:spPr>
+        <p:txBody>
+          <a:bodyPr wrap="square" lIns="0" tIns="0" rIns="0" bIns="0" rtlCol="0" anchor="ctr"/>
+          <a:lstStyle/>
+          <a:p>
+            <a:pPr indent="0" marL="0">
+              <a:buNone/>
+            </a:pPr>
+            <a:r>
+              <a:rPr lang="en-US" sz="1500" i="1" dirty="0">
+                <a:solidFill>
+                  <a:srgbClr val="7FA8C9"/>
+                </a:solidFill>
+                <a:latin typeface="Calibri" pitchFamily="34" charset="0"/>
+                <a:ea typeface="Calibri" pitchFamily="34" charset="-122"/>
+                <a:cs typeface="Calibri" pitchFamily="34" charset="-120"/>
+              </a:rPr>
+              <a:t>Nothing to add — just the general shape</a:t>
+            </a:r>
+            <a:endParaRPr lang="en-US" sz="1500" dirty="0"/>
+          </a:p>
+        </p:txBody>
+      </p:sp>
+      <p:sp>
+        <p:nvSpPr>
+          <p:cNvPr id="11" name="Text 8"/>
+          <p:cNvSpPr/>
+          <p:nvPr/>
+        </p:nvSpPr>
+        <p:spPr>
+          <a:xfrm>
+            <a:off x="914400" y="2057400"/>
+            <a:ext cx="10195560" cy="804672"/>
           </a:xfrm>
           <a:prstGeom prst="rect">
             <a:avLst/>
@@ -3992,18 +4070,18 @@
       </p:sp>
       <p:sp>
         <p:nvSpPr>
-          <p:cNvPr id="11" name="Shape 8"/>
-          <p:cNvSpPr/>
-          <p:nvPr/>
-        </p:nvSpPr>
-        <p:spPr>
-          <a:xfrm>
-            <a:off x="640080" y="3063240"/>
-            <a:ext cx="10881360" cy="3108960"/>
+          <p:cNvPr id="12" name="Shape 9"/>
+          <p:cNvSpPr/>
+          <p:nvPr/>
+        </p:nvSpPr>
+        <p:spPr>
+          <a:xfrm>
+            <a:off x="640080" y="3291840"/>
+            <a:ext cx="10881360" cy="2880360"/>
           </a:xfrm>
           <a:prstGeom prst="roundRect">
             <a:avLst>
-              <a:gd name="adj" fmla="val 2941"/>
+              <a:gd name="adj" fmla="val 3175"/>
             </a:avLst>
           </a:prstGeom>
           <a:solidFill>
@@ -4014,13 +4092,13 @@
       </p:sp>
       <p:sp>
         <p:nvSpPr>
-          <p:cNvPr id="12" name="Text 9"/>
-          <p:cNvSpPr/>
-          <p:nvPr/>
-        </p:nvSpPr>
-        <p:spPr>
-          <a:xfrm>
-            <a:off x="914400" y="3337560"/>
+          <p:cNvPr id="13" name="Text 10"/>
+          <p:cNvSpPr/>
+          <p:nvPr/>
+        </p:nvSpPr>
+        <p:spPr>
+          <a:xfrm>
+            <a:off x="914400" y="3566160"/>
             <a:ext cx="10332720" cy="577850"/>
           </a:xfrm>
           <a:prstGeom prst="rect">
@@ -4056,14 +4134,14 @@
       </p:sp>
       <p:sp>
         <p:nvSpPr>
-          <p:cNvPr id="13" name="Text 10"/>
-          <p:cNvSpPr/>
-          <p:nvPr/>
-        </p:nvSpPr>
-        <p:spPr>
-          <a:xfrm>
-            <a:off x="914400" y="3915410"/>
-            <a:ext cx="10332720" cy="1982470"/>
+          <p:cNvPr id="14" name="Text 11"/>
+          <p:cNvSpPr/>
+          <p:nvPr/>
+        </p:nvSpPr>
+        <p:spPr>
+          <a:xfrm>
+            <a:off x="914400" y="4144010"/>
+            <a:ext cx="10332720" cy="1753870"/>
           </a:xfrm>
           <a:prstGeom prst="rect">
             <a:avLst/>
@@ -4098,7 +4176,7 @@
       </p:sp>
       <p:sp>
         <p:nvSpPr>
-          <p:cNvPr id="14" name="Text 11"/>
+          <p:cNvPr id="15" name="Text 12"/>
           <p:cNvSpPr/>
           <p:nvPr/>
         </p:nvSpPr>
@@ -4137,7 +4215,7 @@
       </p:sp>
       <p:sp>
         <p:nvSpPr>
-          <p:cNvPr id="15" name="Text 12"/>
+          <p:cNvPr id="16" name="Text 13"/>
           <p:cNvSpPr/>
           <p:nvPr/>
         </p:nvSpPr>
@@ -4176,7 +4254,7 @@
       </p:sp>
       <p:pic>
         <p:nvPicPr>
-          <p:cNvPr id="16" name="Image 1" descr="/home/user/BasicRobotLessons/docs/presentations/v3/template/assets/logo/team5010-logo-onwhite.png">    </p:cNvPr>
+          <p:cNvPr id="17" name="Image 1" descr="/home/user/BasicRobotLessons/docs/presentations/v3/template/assets/logo/team5010-logo-onwhite.png">    </p:cNvPr>
           <p:cNvPicPr>
             <a:picLocks noChangeAspect="1"/>
           </p:cNvPicPr>
@@ -4361,11 +4439,11 @@
         <p:spPr>
           <a:xfrm>
             <a:off x="640080" y="1600200"/>
-            <a:ext cx="10881360" cy="1371600"/>
+            <a:ext cx="10881360" cy="1645920"/>
           </a:xfrm>
           <a:prstGeom prst="roundRect">
             <a:avLst>
-              <a:gd name="adj" fmla="val 8000"/>
+              <a:gd name="adj" fmla="val 6667"/>
             </a:avLst>
           </a:prstGeom>
           <a:solidFill>
@@ -4449,8 +4527,47 @@
         </p:nvSpPr>
         <p:spPr>
           <a:xfrm>
-            <a:off x="914400" y="1801368"/>
-            <a:ext cx="10195560" cy="1005840"/>
+            <a:off x="914400" y="1728216"/>
+            <a:ext cx="10195560" cy="292608"/>
+          </a:xfrm>
+          <a:prstGeom prst="rect">
+            <a:avLst/>
+          </a:prstGeom>
+          <a:noFill/>
+          <a:ln/>
+        </p:spPr>
+        <p:txBody>
+          <a:bodyPr wrap="square" lIns="0" tIns="0" rIns="0" bIns="0" rtlCol="0" anchor="ctr"/>
+          <a:lstStyle/>
+          <a:p>
+            <a:pPr indent="0" marL="0">
+              <a:buNone/>
+            </a:pPr>
+            <a:r>
+              <a:rPr lang="en-US" sz="1500" b="1" dirty="0">
+                <a:solidFill>
+                  <a:srgbClr val="FF5010"/>
+                </a:solidFill>
+                <a:latin typeface="Calibri" pitchFamily="34" charset="0"/>
+                <a:ea typeface="Calibri" pitchFamily="34" charset="-122"/>
+                <a:cs typeface="Calibri" pitchFamily="34" charset="-120"/>
+              </a:rPr>
+              <a:t>Edit Robot.java's constructor</a:t>
+            </a:r>
+            <a:endParaRPr lang="en-US" sz="1500" dirty="0"/>
+          </a:p>
+        </p:txBody>
+      </p:sp>
+      <p:sp>
+        <p:nvSpPr>
+          <p:cNvPr id="11" name="Text 8"/>
+          <p:cNvSpPr/>
+          <p:nvPr/>
+        </p:nvSpPr>
+        <p:spPr>
+          <a:xfrm>
+            <a:off x="914400" y="2057400"/>
+            <a:ext cx="10195560" cy="987552"/>
           </a:xfrm>
           <a:prstGeom prst="rect">
             <a:avLst/>
@@ -4525,18 +4642,18 @@
       </p:sp>
       <p:sp>
         <p:nvSpPr>
-          <p:cNvPr id="11" name="Shape 8"/>
-          <p:cNvSpPr/>
-          <p:nvPr/>
-        </p:nvSpPr>
-        <p:spPr>
-          <a:xfrm>
-            <a:off x="640080" y="3337560"/>
-            <a:ext cx="10881360" cy="2834640"/>
+          <p:cNvPr id="12" name="Shape 9"/>
+          <p:cNvSpPr/>
+          <p:nvPr/>
+        </p:nvSpPr>
+        <p:spPr>
+          <a:xfrm>
+            <a:off x="640080" y="3566160"/>
+            <a:ext cx="10881360" cy="2606040"/>
           </a:xfrm>
           <a:prstGeom prst="roundRect">
             <a:avLst>
-              <a:gd name="adj" fmla="val 3226"/>
+              <a:gd name="adj" fmla="val 3509"/>
             </a:avLst>
           </a:prstGeom>
           <a:solidFill>
@@ -4547,13 +4664,13 @@
       </p:sp>
       <p:sp>
         <p:nvSpPr>
-          <p:cNvPr id="12" name="Text 9"/>
-          <p:cNvSpPr/>
-          <p:nvPr/>
-        </p:nvSpPr>
-        <p:spPr>
-          <a:xfrm>
-            <a:off x="914400" y="3611880"/>
+          <p:cNvPr id="13" name="Text 10"/>
+          <p:cNvSpPr/>
+          <p:nvPr/>
+        </p:nvSpPr>
+        <p:spPr>
+          <a:xfrm>
+            <a:off x="914400" y="3840480"/>
             <a:ext cx="10332720" cy="927100"/>
           </a:xfrm>
           <a:prstGeom prst="rect">
@@ -4589,14 +4706,14 @@
       </p:sp>
       <p:sp>
         <p:nvSpPr>
-          <p:cNvPr id="13" name="Text 10"/>
-          <p:cNvSpPr/>
-          <p:nvPr/>
-        </p:nvSpPr>
-        <p:spPr>
-          <a:xfrm>
-            <a:off x="914400" y="4538980"/>
-            <a:ext cx="10332720" cy="1358900"/>
+          <p:cNvPr id="14" name="Text 11"/>
+          <p:cNvSpPr/>
+          <p:nvPr/>
+        </p:nvSpPr>
+        <p:spPr>
+          <a:xfrm>
+            <a:off x="914400" y="4767580"/>
+            <a:ext cx="10332720" cy="1130300"/>
           </a:xfrm>
           <a:prstGeom prst="rect">
             <a:avLst/>
@@ -4631,7 +4748,7 @@
       </p:sp>
       <p:sp>
         <p:nvSpPr>
-          <p:cNvPr id="14" name="Text 11"/>
+          <p:cNvPr id="15" name="Text 12"/>
           <p:cNvSpPr/>
           <p:nvPr/>
         </p:nvSpPr>
@@ -4670,7 +4787,7 @@
       </p:sp>
       <p:sp>
         <p:nvSpPr>
-          <p:cNvPr id="15" name="Text 12"/>
+          <p:cNvPr id="16" name="Text 13"/>
           <p:cNvSpPr/>
           <p:nvPr/>
         </p:nvSpPr>
@@ -4709,7 +4826,7 @@
       </p:sp>
       <p:pic>
         <p:nvPicPr>
-          <p:cNvPr id="16" name="Image 1" descr="/home/user/BasicRobotLessons/docs/presentations/v3/template/assets/logo/team5010-logo-onwhite.png">    </p:cNvPr>
+          <p:cNvPr id="17" name="Image 1" descr="/home/user/BasicRobotLessons/docs/presentations/v3/template/assets/logo/team5010-logo-onwhite.png">    </p:cNvPr>
           <p:cNvPicPr>
             <a:picLocks noChangeAspect="1"/>
           </p:cNvPicPr>
@@ -4982,8 +5099,47 @@
         </p:nvSpPr>
         <p:spPr>
           <a:xfrm>
-            <a:off x="914400" y="1801368"/>
-            <a:ext cx="10195560" cy="3017520"/>
+            <a:off x="914400" y="1728216"/>
+            <a:ext cx="10195560" cy="292608"/>
+          </a:xfrm>
+          <a:prstGeom prst="rect">
+            <a:avLst/>
+          </a:prstGeom>
+          <a:noFill/>
+          <a:ln/>
+        </p:spPr>
+        <p:txBody>
+          <a:bodyPr wrap="square" lIns="0" tIns="0" rIns="0" bIns="0" rtlCol="0" anchor="ctr"/>
+          <a:lstStyle/>
+          <a:p>
+            <a:pPr indent="0" marL="0">
+              <a:buNone/>
+            </a:pPr>
+            <a:r>
+              <a:rPr lang="en-US" sz="1500" b="1" dirty="0">
+                <a:solidFill>
+                  <a:srgbClr val="FF5010"/>
+                </a:solidFill>
+                <a:latin typeface="Calibri" pitchFamily="34" charset="0"/>
+                <a:ea typeface="Calibri" pitchFamily="34" charset="-122"/>
+                <a:cs typeface="Calibri" pitchFamily="34" charset="-120"/>
+              </a:rPr>
+              <a:t>Edit DriveModule's constructor</a:t>
+            </a:r>
+            <a:endParaRPr lang="en-US" sz="1500" dirty="0"/>
+          </a:p>
+        </p:txBody>
+      </p:sp>
+      <p:sp>
+        <p:nvSpPr>
+          <p:cNvPr id="11" name="Text 8"/>
+          <p:cNvSpPr/>
+          <p:nvPr/>
+        </p:nvSpPr>
+        <p:spPr>
+          <a:xfrm>
+            <a:off x="914400" y="2057400"/>
+            <a:ext cx="10195560" cy="2724912"/>
           </a:xfrm>
           <a:prstGeom prst="rect">
             <a:avLst/>
@@ -5002,7 +5158,7 @@
               <a:buNone/>
             </a:pPr>
             <a:r>
-              <a:rPr lang="en-US" sz="1400" dirty="0">
+              <a:rPr lang="en-US" sz="1200" dirty="0">
                 <a:solidFill>
                   <a:srgbClr val="FFD166"/>
                 </a:solidFill>
@@ -5012,7 +5168,7 @@
               </a:rPr>
               <a:t>public DriveModule() {</a:t>
             </a:r>
-            <a:endParaRPr lang="en-US" sz="1400" dirty="0"/>
+            <a:endParaRPr lang="en-US" sz="1200" dirty="0"/>
           </a:p>
           <a:p>
             <a:pPr indent="0" marL="0">
@@ -5022,7 +5178,7 @@
               <a:buNone/>
             </a:pPr>
             <a:r>
-              <a:rPr lang="en-US" sz="1400" dirty="0">
+              <a:rPr lang="en-US" sz="1200" dirty="0">
                 <a:solidFill>
                   <a:srgbClr val="9EF01A"/>
                 </a:solidFill>
@@ -5032,7 +5188,7 @@
               </a:rPr>
               <a:t>  Scheduler.getDefault().addPeriodic(this::logTelemetry);</a:t>
             </a:r>
-            <a:endParaRPr lang="en-US" sz="1400" dirty="0"/>
+            <a:endParaRPr lang="en-US" sz="1200" dirty="0"/>
           </a:p>
           <a:p>
             <a:pPr indent="0" marL="0">
@@ -5042,7 +5198,7 @@
               <a:buNone/>
             </a:pPr>
             <a:r>
-              <a:rPr lang="en-US" sz="1400" dirty="0">
+              <a:rPr lang="en-US" sz="1200" dirty="0">
                 <a:solidFill>
                   <a:srgbClr val="D7E3F4"/>
                 </a:solidFill>
@@ -5052,7 +5208,7 @@
               </a:rPr>
               <a:t>}</a:t>
             </a:r>
-            <a:endParaRPr lang="en-US" sz="1400" dirty="0"/>
+            <a:endParaRPr lang="en-US" sz="1200" dirty="0"/>
           </a:p>
           <a:p>
             <a:pPr indent="0" marL="0">
@@ -5061,7 +5217,7 @@
               </a:lnSpc>
               <a:buNone/>
             </a:pPr>
-            <a:endParaRPr lang="en-US" sz="1400" dirty="0"/>
+            <a:endParaRPr lang="en-US" sz="1200" dirty="0"/>
           </a:p>
           <a:p>
             <a:pPr indent="0" marL="0">
@@ -5071,7 +5227,7 @@
               <a:buNone/>
             </a:pPr>
             <a:r>
-              <a:rPr lang="en-US" sz="1400" dirty="0">
+              <a:rPr lang="en-US" sz="1200" dirty="0">
                 <a:solidFill>
                   <a:srgbClr val="FFD166"/>
                 </a:solidFill>
@@ -5081,7 +5237,7 @@
               </a:rPr>
               <a:t>private void logTelemetry() {</a:t>
             </a:r>
-            <a:endParaRPr lang="en-US" sz="1400" dirty="0"/>
+            <a:endParaRPr lang="en-US" sz="1200" dirty="0"/>
           </a:p>
           <a:p>
             <a:pPr indent="0" marL="0">
@@ -5091,7 +5247,7 @@
               <a:buNone/>
             </a:pPr>
             <a:r>
-              <a:rPr lang="en-US" sz="1400" dirty="0">
+              <a:rPr lang="en-US" sz="1200" dirty="0">
                 <a:solidFill>
                   <a:srgbClr val="D7E3F4"/>
                 </a:solidFill>
@@ -5101,7 +5257,7 @@
               </a:rPr>
               <a:t>  double rotations = m_driveMotor.getPosition().getValue().in(Rotations);</a:t>
             </a:r>
-            <a:endParaRPr lang="en-US" sz="1400" dirty="0"/>
+            <a:endParaRPr lang="en-US" sz="1200" dirty="0"/>
           </a:p>
           <a:p>
             <a:pPr indent="0" marL="0">
@@ -5111,7 +5267,7 @@
               <a:buNone/>
             </a:pPr>
             <a:r>
-              <a:rPr lang="en-US" sz="1400" dirty="0">
+              <a:rPr lang="en-US" sz="1200" dirty="0">
                 <a:solidFill>
                   <a:srgbClr val="D7E3F4"/>
                 </a:solidFill>
@@ -5121,7 +5277,7 @@
               </a:rPr>
               <a:t>  double rps = m_driveMotor.getVelocity().getValue().in(RotationsPerSecond);</a:t>
             </a:r>
-            <a:endParaRPr lang="en-US" sz="1400" dirty="0"/>
+            <a:endParaRPr lang="en-US" sz="1200" dirty="0"/>
           </a:p>
           <a:p>
             <a:pPr indent="0" marL="0">
@@ -5130,7 +5286,7 @@
               </a:lnSpc>
               <a:buNone/>
             </a:pPr>
-            <a:endParaRPr lang="en-US" sz="1400" dirty="0"/>
+            <a:endParaRPr lang="en-US" sz="1200" dirty="0"/>
           </a:p>
           <a:p>
             <a:pPr indent="0" marL="0">
@@ -5140,7 +5296,7 @@
               <a:buNone/>
             </a:pPr>
             <a:r>
-              <a:rPr lang="en-US" sz="1400" dirty="0">
+              <a:rPr lang="en-US" sz="1200" dirty="0">
                 <a:solidFill>
                   <a:srgbClr val="9EF01A"/>
                 </a:solidFill>
@@ -5150,7 +5306,7 @@
               </a:rPr>
               <a:t>  SmartDashboard.putNumber("DriveModule/PositionRotations", rotations);</a:t>
             </a:r>
-            <a:endParaRPr lang="en-US" sz="1400" dirty="0"/>
+            <a:endParaRPr lang="en-US" sz="1200" dirty="0"/>
           </a:p>
           <a:p>
             <a:pPr indent="0" marL="0">
@@ -5160,7 +5316,7 @@
               <a:buNone/>
             </a:pPr>
             <a:r>
-              <a:rPr lang="en-US" sz="1400" dirty="0">
+              <a:rPr lang="en-US" sz="1200" dirty="0">
                 <a:solidFill>
                   <a:srgbClr val="9EF01A"/>
                 </a:solidFill>
@@ -5170,7 +5326,7 @@
               </a:rPr>
               <a:t>  SmartDashboard.putNumber("DriveModule/VelocityRotPerSec", rps);</a:t>
             </a:r>
-            <a:endParaRPr lang="en-US" sz="1400" dirty="0"/>
+            <a:endParaRPr lang="en-US" sz="1200" dirty="0"/>
           </a:p>
           <a:p>
             <a:pPr indent="0" marL="0">
@@ -5180,7 +5336,7 @@
               <a:buNone/>
             </a:pPr>
             <a:r>
-              <a:rPr lang="en-US" sz="1400" dirty="0">
+              <a:rPr lang="en-US" sz="1200" dirty="0">
                 <a:solidFill>
                   <a:srgbClr val="D7E3F4"/>
                 </a:solidFill>
@@ -5190,13 +5346,13 @@
               </a:rPr>
               <a:t>}</a:t>
             </a:r>
-            <a:endParaRPr lang="en-US" sz="1400" dirty="0"/>
-          </a:p>
-        </p:txBody>
-      </p:sp>
-      <p:sp>
-        <p:nvSpPr>
-          <p:cNvPr id="11" name="Shape 8"/>
+            <a:endParaRPr lang="en-US" sz="1200" dirty="0"/>
+          </a:p>
+        </p:txBody>
+      </p:sp>
+      <p:sp>
+        <p:nvSpPr>
+          <p:cNvPr id="12" name="Shape 9"/>
           <p:cNvSpPr/>
           <p:nvPr/>
         </p:nvSpPr>
@@ -5218,7 +5374,7 @@
       </p:sp>
       <p:sp>
         <p:nvSpPr>
-          <p:cNvPr id="12" name="Text 9"/>
+          <p:cNvPr id="13" name="Text 10"/>
           <p:cNvSpPr/>
           <p:nvPr/>
         </p:nvSpPr>
@@ -5260,7 +5416,7 @@
       </p:sp>
       <p:sp>
         <p:nvSpPr>
-          <p:cNvPr id="13" name="Text 10"/>
+          <p:cNvPr id="14" name="Text 11"/>
           <p:cNvSpPr/>
           <p:nvPr/>
         </p:nvSpPr>
@@ -5299,7 +5455,7 @@
       </p:sp>
       <p:sp>
         <p:nvSpPr>
-          <p:cNvPr id="14" name="Text 11"/>
+          <p:cNvPr id="15" name="Text 12"/>
           <p:cNvSpPr/>
           <p:nvPr/>
         </p:nvSpPr>
@@ -5338,7 +5494,7 @@
       </p:sp>
       <p:pic>
         <p:nvPicPr>
-          <p:cNvPr id="15" name="Image 1" descr="/home/user/BasicRobotLessons/docs/presentations/v3/template/assets/logo/team5010-logo-onwhite.png">    </p:cNvPr>
+          <p:cNvPr id="16" name="Image 1" descr="/home/user/BasicRobotLessons/docs/presentations/v3/template/assets/logo/team5010-logo-onwhite.png">    </p:cNvPr>
           <p:cNvPicPr>
             <a:picLocks noChangeAspect="1"/>
           </p:cNvPicPr>
@@ -6479,11 +6635,11 @@
         <p:spPr>
           <a:xfrm>
             <a:off x="640080" y="1600200"/>
-            <a:ext cx="10881360" cy="2286000"/>
+            <a:ext cx="10881360" cy="2560320"/>
           </a:xfrm>
           <a:prstGeom prst="roundRect">
             <a:avLst>
-              <a:gd name="adj" fmla="val 4800"/>
+              <a:gd name="adj" fmla="val 4286"/>
             </a:avLst>
           </a:prstGeom>
           <a:solidFill>
@@ -6567,8 +6723,47 @@
         </p:nvSpPr>
         <p:spPr>
           <a:xfrm>
-            <a:off x="914400" y="1801368"/>
-            <a:ext cx="10195560" cy="1920240"/>
+            <a:off x="914400" y="1728216"/>
+            <a:ext cx="10195560" cy="292608"/>
+          </a:xfrm>
+          <a:prstGeom prst="rect">
+            <a:avLst/>
+          </a:prstGeom>
+          <a:noFill/>
+          <a:ln/>
+        </p:spPr>
+        <p:txBody>
+          <a:bodyPr wrap="square" lIns="0" tIns="0" rIns="0" bIns="0" rtlCol="0" anchor="ctr"/>
+          <a:lstStyle/>
+          <a:p>
+            <a:pPr indent="0" marL="0">
+              <a:buNone/>
+            </a:pPr>
+            <a:r>
+              <a:rPr lang="en-US" sz="1500" b="1" dirty="0">
+                <a:solidFill>
+                  <a:srgbClr val="FF5010"/>
+                </a:solidFill>
+                <a:latin typeface="Calibri" pitchFamily="34" charset="0"/>
+                <a:ea typeface="Calibri" pitchFamily="34" charset="-122"/>
+                <a:cs typeface="Calibri" pitchFamily="34" charset="-120"/>
+              </a:rPr>
+              <a:t>Edit Robot: add the listener, then replace logRunningCommand()</a:t>
+            </a:r>
+            <a:endParaRPr lang="en-US" sz="1500" dirty="0"/>
+          </a:p>
+        </p:txBody>
+      </p:sp>
+      <p:sp>
+        <p:nvSpPr>
+          <p:cNvPr id="11" name="Text 8"/>
+          <p:cNvSpPr/>
+          <p:nvPr/>
+        </p:nvSpPr>
+        <p:spPr>
+          <a:xfrm>
+            <a:off x="914400" y="2057400"/>
+            <a:ext cx="10195560" cy="1901952"/>
           </a:xfrm>
           <a:prstGeom prst="rect">
             <a:avLst/>
@@ -6732,18 +6927,18 @@
       </p:sp>
       <p:sp>
         <p:nvSpPr>
-          <p:cNvPr id="11" name="Shape 8"/>
-          <p:cNvSpPr/>
-          <p:nvPr/>
-        </p:nvSpPr>
-        <p:spPr>
-          <a:xfrm>
-            <a:off x="640080" y="4023360"/>
-            <a:ext cx="10881360" cy="2377440"/>
+          <p:cNvPr id="12" name="Shape 9"/>
+          <p:cNvSpPr/>
+          <p:nvPr/>
+        </p:nvSpPr>
+        <p:spPr>
+          <a:xfrm>
+            <a:off x="640080" y="4297680"/>
+            <a:ext cx="10881360" cy="2103120"/>
           </a:xfrm>
           <a:prstGeom prst="roundRect">
             <a:avLst>
-              <a:gd name="adj" fmla="val 3846"/>
+              <a:gd name="adj" fmla="val 4348"/>
             </a:avLst>
           </a:prstGeom>
           <a:solidFill>
@@ -6754,13 +6949,13 @@
       </p:sp>
       <p:sp>
         <p:nvSpPr>
-          <p:cNvPr id="12" name="Text 9"/>
-          <p:cNvSpPr/>
-          <p:nvPr/>
-        </p:nvSpPr>
-        <p:spPr>
-          <a:xfrm>
-            <a:off x="914400" y="4297680"/>
+          <p:cNvPr id="13" name="Text 10"/>
+          <p:cNvSpPr/>
+          <p:nvPr/>
+        </p:nvSpPr>
+        <p:spPr>
+          <a:xfrm>
+            <a:off x="914400" y="4572000"/>
             <a:ext cx="10332720" cy="546100"/>
           </a:xfrm>
           <a:prstGeom prst="rect">
@@ -6796,14 +6991,14 @@
       </p:sp>
       <p:sp>
         <p:nvSpPr>
-          <p:cNvPr id="13" name="Text 10"/>
-          <p:cNvSpPr/>
-          <p:nvPr/>
-        </p:nvSpPr>
-        <p:spPr>
-          <a:xfrm>
-            <a:off x="914400" y="4843780"/>
-            <a:ext cx="10332720" cy="1282700"/>
+          <p:cNvPr id="14" name="Text 11"/>
+          <p:cNvSpPr/>
+          <p:nvPr/>
+        </p:nvSpPr>
+        <p:spPr>
+          <a:xfrm>
+            <a:off x="914400" y="5118100"/>
+            <a:ext cx="10332720" cy="1008380"/>
           </a:xfrm>
           <a:prstGeom prst="rect">
             <a:avLst/>
@@ -6830,7 +7025,7 @@
                 <a:ea typeface="Calibri" pitchFamily="34" charset="-122"/>
                 <a:cs typeface="Calibri" pitchFamily="34" charset="-120"/>
               </a:rPr>
-              <a:t>Only the specific kind has .command() on it. The old version polled every tick and got lucky every time; this version can't get unlucky, because it isn't asking — it's told.</a:t>
+              <a:t>Only the specific kind has .command() on it. The old version polled and got lucky every time; this one can't get unlucky — it isn't asking, it's told.</a:t>
             </a:r>
             <a:endParaRPr lang="en-US" sz="2000" dirty="0"/>
           </a:p>
@@ -6838,7 +7033,7 @@
       </p:sp>
       <p:sp>
         <p:nvSpPr>
-          <p:cNvPr id="14" name="Text 11"/>
+          <p:cNvPr id="15" name="Text 12"/>
           <p:cNvSpPr/>
           <p:nvPr/>
         </p:nvSpPr>
@@ -6877,7 +7072,7 @@
       </p:sp>
       <p:sp>
         <p:nvSpPr>
-          <p:cNvPr id="15" name="Text 12"/>
+          <p:cNvPr id="16" name="Text 13"/>
           <p:cNvSpPr/>
           <p:nvPr/>
         </p:nvSpPr>
@@ -6916,7 +7111,7 @@
       </p:sp>
       <p:pic>
         <p:nvPicPr>
-          <p:cNvPr id="16" name="Image 1" descr="/home/user/BasicRobotLessons/docs/presentations/v3/template/assets/logo/team5010-logo-onwhite.png">    </p:cNvPr>
+          <p:cNvPr id="17" name="Image 1" descr="/home/user/BasicRobotLessons/docs/presentations/v3/template/assets/logo/team5010-logo-onwhite.png">    </p:cNvPr>
           <p:cNvPicPr>
             <a:picLocks noChangeAspect="1"/>
           </p:cNvPicPr>

--- a/docs/presentations/v3/03-telemetry.pptx
+++ b/docs/presentations/v3/03-telemetry.pptx
@@ -511,7 +511,7 @@
           <a:p>
             <a:r>
               <a:rPr lang="en-US" dirty="0"/>
-              <a:t/>
+              <a:t>So far the conversation with the motor has been one-way — you talk, it spins. This lesson makes it talk back: a TalonFX has a built-in encoder that reports position and velocity for free, and the theme of the whole lesson is asking instead of telling.</a:t>
             </a:r>
             <a:endParaRPr lang="en-US" dirty="0"/>
           </a:p>
@@ -599,7 +599,7 @@
           <a:p>
             <a:r>
               <a:rPr lang="en-US" dirty="0"/>
-              <a:t/>
+              <a:t>That naming discipline — Mechanism/Name — feels like overkill for two values; it stops being overkill around value twenty, and this course gets there sooner than it seems. The bigger shift is trading a poll for a listener: logRunningCommand() asked a question every tick and happened to always have an answer, but "happened to" isn't a guarantee. logCommandStart() doesn't ask at all — it registers once and reacts exactly when a SchedulerEvent.Scheduled actually occurs, unpacked with instanceof pattern matching. Same dashboard key, same string showing up, but nothing left that can come up empty. The plots look unimpressive while the sim motor stands still, but Lesson 4 turns the physics on, and these same plots come alive.</a:t>
             </a:r>
             <a:endParaRPr lang="en-US" dirty="0"/>
           </a:p>
@@ -687,7 +687,7 @@
           <a:p>
             <a:r>
               <a:rPr lang="en-US" dirty="0"/>
-              <a:t/>
+              <a:t>A TalonFX's built-in encoder gives you position — how many rotations the motor has turned since boot — and velocity, how fast it's turning right now in rotations per second. You read these instead of setting them, which is the "questions vs. actions" split the rest of the lesson builds on.</a:t>
             </a:r>
             <a:endParaRPr lang="en-US" dirty="0"/>
           </a:p>
@@ -775,7 +775,7 @@
           <a:p>
             <a:r>
               <a:rPr lang="en-US" dirty="0"/>
-              <a:t/>
+              <a:t>Walk the chain left to right like a little assembly line. m_driveMotor.getPosition() doesn't return a plain number — it returns a signal object, Phoenix's wrapper that carries the value together with a timestamp. .getValue() reads the signal's current value, but that's a measurement that remembers its own unit, so it can't be silently misread as the wrong one. .in(Rotations) is where you say which unit you want it as. This is also a good moment to name a pattern already in use without a name: setThrottle(0.3) is an action — nothing comes back — while getPosition() is a question, and the answer comes back as a return value to catch in a variable. From this lesson on, question-methods start doing the heavy lifting.</a:t>
             </a:r>
             <a:endParaRPr lang="en-US" dirty="0"/>
           </a:p>
@@ -863,7 +863,7 @@
           <a:p>
             <a:r>
               <a:rPr lang="en-US" dirty="0"/>
-              <a:t/>
+              <a:t>Your code runs on the robot; you're looking at a laptop. SmartDashboard.putNumber("some name", value) is the plumbing that gets a number from one to the other, live. This course holds a standard from day one: the name is the address. Every value goes under an organized name, one branch per mechanism, so a hundred values from now you can still find the one you want — and names carry their units too, PositionRotations rather than just Position, so nobody has to guess what a number means later.</a:t>
             </a:r>
             <a:endParaRPr lang="en-US" dirty="0"/>
           </a:p>
@@ -951,7 +951,7 @@
           <a:p>
             <a:r>
               <a:rPr lang="en-US" dirty="0"/>
-              <a:t/>
+              <a:t>SmartDashboard's values are live — visible while the robot runs, gone the instant it stops — unless something is also saving them. DataLogManager.start() does exactly that: start it once, and every value published anywhere gets mirrored into a .wpilog file automatically. It has to go at the very top of the Robot constructor, before anything else gets set up. Recording sim sessions might sound like overkill, but it isn't — a session you can scrub through afterward is how you answer "wait, what just happened?" without having to make it happen again.</a:t>
             </a:r>
             <a:endParaRPr lang="en-US" dirty="0"/>
           </a:p>
@@ -1039,7 +1039,7 @@
           <a:p>
             <a:r>
               <a:rPr lang="en-US" dirty="0"/>
-              <a:t/>
+              <a:t>You want telemetry fresh always, not just while some command happens to be running — that means it belongs somewhere that always runs, on its own schedule, independent of whatever command is currently active. Scheduler.getDefault().addPeriodic(...) registers a callback that runs every tick, forever, for as long as the robot runs, no command required. this::logTelemetry is a method reference — shorthand for () -&gt; this.logTelemetry() — reads naturally out loud as "add a periodic task, this dot logTelemetry." The slash in the dashboard key isn't decoration; it builds a folder tree, and the organization rule for this whole course is that every value a mechanism logs starts with the mechanism's name and a slash. When this robot grows to four modules, a gyro, and an arm, that tree is what keeps a hundred values findable. Worth calling out the standing habit: log from a steady, always-running callback like this one, not from inside command bodies — commands come and go, this callback doesn't, so plots never go blank just because a command ended.</a:t>
             </a:r>
             <a:endParaRPr lang="en-US" dirty="0"/>
           </a:p>
@@ -1127,7 +1127,7 @@
           <a:p>
             <a:r>
               <a:rPr lang="en-US" dirty="0"/>
-              <a:t/>
+              <a:t>AdvantageScope ships in the WPILib installer, so it's already there — it plots live data, overlays signals, scrubs back through time, and opens .wpilog flight-recorder files. Don't be discouraged when the traces sit nearly flat even at full stick — in simulation the motor isn't actually turning yet, so there's nothing for the encoder to count. That's exactly what Lesson 4 fixes. What's built today is the pipe; next lesson gives it something real to carry. On a real robot these plots already work — spin the wheel by hand and watch position climb. And sim or real, DataLogManager has been saving every value to a .wpilog file this whole time; open one with File → Open Log(s) to scrub back through an entire session. This tool comes back constantly — tuning P control in Lesson 5, comparing commanded vs. actual speed, eventually watching the robot drive around a virtual field.</a:t>
             </a:r>
             <a:endParaRPr lang="en-US" dirty="0"/>
           </a:p>
@@ -1215,7 +1215,7 @@
           <a:p>
             <a:r>
               <a:rPr lang="en-US" dirty="0"/>
-              <a:t/>
+              <a:t>Lesson 1's logRunningCommand() asked the scheduler a question every tick and read entry zero off the answer — it worked because every command built so far either parks or loops until canceled, so there's always something running whenever you ask. That guarantee won't last: later lessons build commands that finish on their own, and Lesson 8 ships one that can finish the instant it's scheduled, before a poll ever gets a chance to see it run — asking at just the wrong moment means reading past the end of an empty list, not a stale answer. The fix isn't a smarter poll, it's not polling at all: the scheduler announces every SchedulerEvent it fires — scheduled, completed, canceled, interrupted, and a few more — and addEventListener reacts the instant one happens. The if line does two jobs at once: "event instanceof SchedulerEvent.Scheduled scheduled" asks whether this event is specifically a Scheduled event, and if so hands it back as a variable named scheduled, typed as that specific kind rather than the general SchedulerEvent — which is why the check has to come first, since only the specific kind has a .command() on it. The &amp;&amp; after it can use scheduled right away because Java only evaluates the rest of the line once the left side has already passed. scheduled.command().requires(module) matters because the same event stream fires for every mechanism on the robot, not just this one. Run it again and press the button: DriveModule/CurrentCommand still flips the same way as before — what changed is that it isn't asking anymore, it's told.</a:t>
             </a:r>
             <a:endParaRPr lang="en-US" dirty="0"/>
           </a:p>
@@ -1303,7 +1303,7 @@
           <a:p>
             <a:r>
               <a:rPr lang="en-US" dirty="0"/>
-              <a:t/>
+              <a:t>Logging the commanded speed is a refinement of the always-running rule from section 4: a value that only exists inside a command — like the command's own output — gets logged right where it's computed, not from a periodic callback. On a real robot, overlaying CommandedOutput against VelocityRotPerSec shows how the motor lags the command — the seed of understanding control, which pays off starting in Lesson 5. getPositionRotations() is worth calling out as exposing a reading method alongside command factories — that's fine, readings are safe to share, unlike commands. Renaming a dashboard key is a hands-on demonstration that the slash really is a folder path and the name really is the address — the old entry goes stale and a new folder appears in the tree. The SchedulerEvent.Completed exercise previews the vocabulary callout: Scheduled isn't the only kind of event.</a:t>
             </a:r>
             <a:endParaRPr lang="en-US" dirty="0"/>
           </a:p>
